--- a/docs/ci-cd-sample-아키텍처분석.pptx
+++ b/docs/ci-cd-sample-아키텍처분석.pptx
@@ -4093,7 +4093,7 @@
                 </a:solidFill>
                 <a:latin typeface="맑은 고딕"/>
               </a:rPr>
-              <a:t>2026-07-26 · v0.1.0</a:t>
+              <a:t>2026-07-26 · v0.1.1</a:t>
             </a:r>
           </a:p>
         </p:txBody>
@@ -7245,7 +7245,7 @@
                 </a:solidFill>
                 <a:latin typeface="맑은 고딕"/>
               </a:rPr>
-              <a:t>kotlin·ksp·compose·hilt 를 그룹으로 묶어 동시 갱신</a:t>
+              <a:t>actions 4건 병합. gradle 5건은 compileSdk 37 요구로 보류</a:t>
             </a:r>
           </a:p>
         </p:txBody>
@@ -8829,7 +8829,7 @@
                 </a:solidFill>
                 <a:latin typeface="맑은 고딕"/>
               </a:rPr>
-              <a:t>ci-cd-sample · v0.1.0 · 2026-07-26</a:t>
+              <a:t>ci-cd-sample · v0.1.1 · 2026-07-26</a:t>
             </a:r>
           </a:p>
         </p:txBody>
@@ -9345,6 +9345,231 @@
             <a:avLst/>
           </a:prstGeom>
           <a:solidFill>
+            <a:srgbClr val="FFFFFF"/>
+          </a:solidFill>
+          <a:ln w="6350">
+            <a:solidFill>
+              <a:srgbClr val="D3DAE6"/>
+            </a:solidFill>
+          </a:ln>
+          <a:effectLst/>
+        </p:spPr>
+        <p:style>
+          <a:lnRef idx="1">
+            <a:schemeClr val="accent1"/>
+          </a:lnRef>
+          <a:fillRef idx="3">
+            <a:schemeClr val="accent1"/>
+          </a:fillRef>
+          <a:effectRef idx="2">
+            <a:schemeClr val="accent1"/>
+          </a:effectRef>
+          <a:fontRef idx="minor">
+            <a:schemeClr val="lt1"/>
+          </a:fontRef>
+        </p:style>
+        <p:txBody>
+          <a:bodyPr rtlCol="0" anchor="ctr"/>
+          <a:lstStyle/>
+          <a:p>
+            <a:pPr algn="ctr"/>
+          </a:p>
+        </p:txBody>
+      </p:sp>
+      <p:sp>
+        <p:nvSpPr>
+          <p:cNvPr id="14" name="TextBox 13"/>
+          <p:cNvSpPr txBox="1"/>
+          <p:nvPr/>
+        </p:nvSpPr>
+        <p:spPr>
+          <a:xfrm>
+            <a:off x="886968" y="2267712"/>
+            <a:ext cx="1143000" cy="443484"/>
+          </a:xfrm>
+          <a:prstGeom prst="rect">
+            <a:avLst/>
+          </a:prstGeom>
+          <a:noFill/>
+        </p:spPr>
+        <p:txBody>
+          <a:bodyPr wrap="square" anchor="ctr" lIns="25400" rIns="25400" tIns="12700" bIns="12700">
+            <a:spAutoFit/>
+          </a:bodyPr>
+          <a:lstStyle/>
+          <a:p>
+            <a:pPr algn="l">
+              <a:spcBef>
+                <a:spcPts val="0"/>
+              </a:spcBef>
+              <a:spcAft>
+                <a:spcPts val="200"/>
+              </a:spcAft>
+            </a:pPr>
+            <a:r>
+              <a:rPr sz="1150" b="1">
+                <a:solidFill>
+                  <a:srgbClr val="1A2333"/>
+                </a:solidFill>
+                <a:latin typeface="Consolas"/>
+              </a:rPr>
+              <a:t>v0.1.0</a:t>
+            </a:r>
+          </a:p>
+        </p:txBody>
+      </p:sp>
+      <p:sp>
+        <p:nvSpPr>
+          <p:cNvPr id="15" name="TextBox 14"/>
+          <p:cNvSpPr txBox="1"/>
+          <p:nvPr/>
+        </p:nvSpPr>
+        <p:spPr>
+          <a:xfrm>
+            <a:off x="2212848" y="2267712"/>
+            <a:ext cx="1234440" cy="443484"/>
+          </a:xfrm>
+          <a:prstGeom prst="rect">
+            <a:avLst/>
+          </a:prstGeom>
+          <a:noFill/>
+        </p:spPr>
+        <p:txBody>
+          <a:bodyPr wrap="square" anchor="ctr" lIns="25400" rIns="25400" tIns="12700" bIns="12700">
+            <a:spAutoFit/>
+          </a:bodyPr>
+          <a:lstStyle/>
+          <a:p>
+            <a:pPr algn="l">
+              <a:spcBef>
+                <a:spcPts val="0"/>
+              </a:spcBef>
+              <a:spcAft>
+                <a:spcPts val="200"/>
+              </a:spcAft>
+            </a:pPr>
+            <a:r>
+              <a:rPr sz="1050" b="0">
+                <a:solidFill>
+                  <a:srgbClr val="5B6677"/>
+                </a:solidFill>
+                <a:latin typeface="Consolas"/>
+              </a:rPr>
+              <a:t>2026-07-26</a:t>
+            </a:r>
+          </a:p>
+        </p:txBody>
+      </p:sp>
+      <p:sp>
+        <p:nvSpPr>
+          <p:cNvPr id="16" name="Rectangle 15"/>
+          <p:cNvSpPr/>
+          <p:nvPr/>
+        </p:nvSpPr>
+        <p:spPr>
+          <a:xfrm>
+            <a:off x="3630168" y="2322576"/>
+            <a:ext cx="749808" cy="297179"/>
+          </a:xfrm>
+          <a:prstGeom prst="rect">
+            <a:avLst/>
+          </a:prstGeom>
+          <a:solidFill>
+            <a:srgbClr val="2F5BEA"/>
+          </a:solidFill>
+          <a:ln>
+            <a:noFill/>
+          </a:ln>
+          <a:effectLst/>
+        </p:spPr>
+        <p:style>
+          <a:lnRef idx="1">
+            <a:schemeClr val="accent1"/>
+          </a:lnRef>
+          <a:fillRef idx="3">
+            <a:schemeClr val="accent1"/>
+          </a:fillRef>
+          <a:effectRef idx="2">
+            <a:schemeClr val="accent1"/>
+          </a:effectRef>
+          <a:fontRef idx="minor">
+            <a:schemeClr val="lt1"/>
+          </a:fontRef>
+        </p:style>
+        <p:txBody>
+          <a:bodyPr rtlCol="0" anchor="ctr" wrap="square" lIns="50800" rIns="50800" tIns="25400" bIns="25400"/>
+          <a:lstStyle/>
+          <a:p>
+            <a:pPr algn="ctr"/>
+            <a:r>
+              <a:rPr sz="1000" b="1">
+                <a:solidFill>
+                  <a:srgbClr val="FFFFFF"/>
+                </a:solidFill>
+                <a:latin typeface="맑은 고딕"/>
+              </a:rPr>
+              <a:t>init</a:t>
+            </a:r>
+          </a:p>
+        </p:txBody>
+      </p:sp>
+      <p:sp>
+        <p:nvSpPr>
+          <p:cNvPr id="17" name="TextBox 16"/>
+          <p:cNvSpPr txBox="1"/>
+          <p:nvPr/>
+        </p:nvSpPr>
+        <p:spPr>
+          <a:xfrm>
+            <a:off x="4636008" y="2267712"/>
+            <a:ext cx="6812280" cy="443484"/>
+          </a:xfrm>
+          <a:prstGeom prst="rect">
+            <a:avLst/>
+          </a:prstGeom>
+          <a:noFill/>
+        </p:spPr>
+        <p:txBody>
+          <a:bodyPr wrap="square" anchor="ctr" lIns="25400" rIns="25400" tIns="12700" bIns="12700">
+            <a:spAutoFit/>
+          </a:bodyPr>
+          <a:lstStyle/>
+          <a:p>
+            <a:pPr algn="l">
+              <a:spcBef>
+                <a:spcPts val="0"/>
+              </a:spcBef>
+              <a:spcAft>
+                <a:spcPts val="200"/>
+              </a:spcAft>
+            </a:pPr>
+            <a:r>
+              <a:rPr sz="1050" b="0">
+                <a:solidFill>
+                  <a:srgbClr val="5B6677"/>
+                </a:solidFill>
+                <a:latin typeface="맑은 고딕"/>
+              </a:rPr>
+              <a:t>3계층 샘플 앱, 3단 테스트, CI/CD 파이프라인 최초 정리</a:t>
+            </a:r>
+          </a:p>
+        </p:txBody>
+      </p:sp>
+      <p:sp>
+        <p:nvSpPr>
+          <p:cNvPr id="18" name="Rectangle 17"/>
+          <p:cNvSpPr/>
+          <p:nvPr/>
+        </p:nvSpPr>
+        <p:spPr>
+          <a:xfrm>
+            <a:off x="777240" y="2738628"/>
+            <a:ext cx="10744200" cy="534924"/>
+          </a:xfrm>
+          <a:prstGeom prst="rect">
+            <a:avLst/>
+          </a:prstGeom>
+          <a:solidFill>
             <a:srgbClr val="E8F4EE"/>
           </a:solidFill>
           <a:ln w="6350">
@@ -9378,13 +9603,13 @@
       </p:sp>
       <p:sp>
         <p:nvSpPr>
-          <p:cNvPr id="14" name="TextBox 13"/>
-          <p:cNvSpPr txBox="1"/>
-          <p:nvPr/>
-        </p:nvSpPr>
-        <p:spPr>
-          <a:xfrm>
-            <a:off x="886968" y="2267712"/>
+          <p:cNvPr id="19" name="TextBox 18"/>
+          <p:cNvSpPr txBox="1"/>
+          <p:nvPr/>
+        </p:nvSpPr>
+        <p:spPr>
+          <a:xfrm>
+            <a:off x="886968" y="2802636"/>
             <a:ext cx="1143000" cy="443484"/>
           </a:xfrm>
           <a:prstGeom prst="rect">
@@ -9413,20 +9638,20 @@
                 </a:solidFill>
                 <a:latin typeface="Consolas"/>
               </a:rPr>
-              <a:t>v0.1.0</a:t>
-            </a:r>
-          </a:p>
-        </p:txBody>
-      </p:sp>
-      <p:sp>
-        <p:nvSpPr>
-          <p:cNvPr id="15" name="TextBox 14"/>
-          <p:cNvSpPr txBox="1"/>
-          <p:nvPr/>
-        </p:nvSpPr>
-        <p:spPr>
-          <a:xfrm>
-            <a:off x="2212848" y="2267712"/>
+              <a:t>v0.1.1</a:t>
+            </a:r>
+          </a:p>
+        </p:txBody>
+      </p:sp>
+      <p:sp>
+        <p:nvSpPr>
+          <p:cNvPr id="20" name="TextBox 19"/>
+          <p:cNvSpPr txBox="1"/>
+          <p:nvPr/>
+        </p:nvSpPr>
+        <p:spPr>
+          <a:xfrm>
+            <a:off x="2212848" y="2802636"/>
             <a:ext cx="1234440" cy="443484"/>
           </a:xfrm>
           <a:prstGeom prst="rect">
@@ -9462,20 +9687,20 @@
       </p:sp>
       <p:sp>
         <p:nvSpPr>
-          <p:cNvPr id="16" name="Rectangle 15"/>
+          <p:cNvPr id="21" name="Rectangle 20"/>
           <p:cNvSpPr/>
           <p:nvPr/>
         </p:nvSpPr>
         <p:spPr>
           <a:xfrm>
-            <a:off x="3630168" y="2322576"/>
+            <a:off x="3630168" y="2857500"/>
             <a:ext cx="749808" cy="297179"/>
           </a:xfrm>
           <a:prstGeom prst="rect">
             <a:avLst/>
           </a:prstGeom>
           <a:solidFill>
-            <a:srgbClr val="2F5BEA"/>
+            <a:srgbClr val="E0512E"/>
           </a:solidFill>
           <a:ln>
             <a:noFill/>
@@ -9508,20 +9733,20 @@
                 </a:solidFill>
                 <a:latin typeface="맑은 고딕"/>
               </a:rPr>
-              <a:t>init</a:t>
-            </a:r>
-          </a:p>
-        </p:txBody>
-      </p:sp>
-      <p:sp>
-        <p:nvSpPr>
-          <p:cNvPr id="17" name="TextBox 16"/>
-          <p:cNvSpPr txBox="1"/>
-          <p:nvPr/>
-        </p:nvSpPr>
-        <p:spPr>
-          <a:xfrm>
-            <a:off x="4636008" y="2267712"/>
+              <a:t>fix</a:t>
+            </a:r>
+          </a:p>
+        </p:txBody>
+      </p:sp>
+      <p:sp>
+        <p:nvSpPr>
+          <p:cNvPr id="22" name="TextBox 21"/>
+          <p:cNvSpPr txBox="1"/>
+          <p:nvPr/>
+        </p:nvSpPr>
+        <p:spPr>
+          <a:xfrm>
+            <a:off x="4636008" y="2802636"/>
             <a:ext cx="6812280" cy="443484"/>
           </a:xfrm>
           <a:prstGeom prst="rect">
@@ -9550,14 +9775,14 @@
                 </a:solidFill>
                 <a:latin typeface="맑은 고딕"/>
               </a:rPr>
-              <a:t>3계층 샘플 앱, 3단 테스트, CI/CD 파이프라인 최초 정리</a:t>
-            </a:r>
-          </a:p>
-        </p:txBody>
-      </p:sp>
-      <p:sp>
-        <p:nvSpPr>
-          <p:cNvPr id="18" name="TextBox 17"/>
+              <a:t>Actions 버전 4건 갱신(Node 20 경고 해소), CI 실측 시간 반영</a:t>
+            </a:r>
+          </a:p>
+        </p:txBody>
+      </p:sp>
+      <p:sp>
+        <p:nvSpPr>
+          <p:cNvPr id="23" name="TextBox 22"/>
           <p:cNvSpPr txBox="1"/>
           <p:nvPr/>
         </p:nvSpPr>
@@ -9599,7 +9824,7 @@
       </p:sp>
       <p:sp>
         <p:nvSpPr>
-          <p:cNvPr id="19" name="TextBox 18"/>
+          <p:cNvPr id="24" name="TextBox 23"/>
           <p:cNvSpPr txBox="1"/>
           <p:nvPr/>
         </p:nvSpPr>
@@ -22032,7 +22257,7 @@
                 </a:solidFill>
                 <a:latin typeface="맑은 고딕"/>
               </a:rPr>
-              <a:t>단위 44 + 린트 · 약 3분</a:t>
+              <a:t>단위 44 + 린트 · 1분 10초</a:t>
             </a:r>
           </a:p>
         </p:txBody>
@@ -22104,7 +22329,7 @@
                 </a:solidFill>
                 <a:latin typeface="맑은 고딕"/>
               </a:rPr>
-              <a:t>assembleDebug · 약 3분 30초</a:t>
+              <a:t>assembleDebug · 57초</a:t>
             </a:r>
           </a:p>
         </p:txBody>
@@ -22176,7 +22401,7 @@
                 </a:solidFill>
                 <a:latin typeface="맑은 고딕"/>
               </a:rPr>
-              <a:t>에뮬레이터 + Maestro</a:t>
+              <a:t>에뮬레이터 + Maestro · 4분 35초</a:t>
             </a:r>
           </a:p>
         </p:txBody>
